--- a/论文配图/图片2.pptx
+++ b/论文配图/图片2.pptx
@@ -6,6 +6,7 @@
   </p:sldMasterIdLst>
   <p:sldIdLst>
     <p:sldId id="257" r:id="rId3"/>
+    <p:sldId id="258" r:id="rId4"/>
   </p:sldIdLst>
   <p:sldSz cx="12192000" cy="6858000"/>
   <p:notesSz cx="6858000" cy="9144000"/>
@@ -107,12 +108,12 @@
   <p:extLst>
     <p:ext uri="{EFAFB233-063F-42B5-8137-9DF3F51BA10A}">
       <p15:sldGuideLst xmlns:p15="http://schemas.microsoft.com/office/powerpoint/2012/main">
-        <p15:guide id="1" orient="horz" pos="2108" userDrawn="1">
+        <p15:guide id="1" orient="horz" pos="2135" userDrawn="1">
           <p15:clr>
             <a:srgbClr val="A4A3A4"/>
           </p15:clr>
         </p15:guide>
-        <p15:guide id="2" pos="3964" userDrawn="1">
+        <p15:guide id="2" pos="3975" userDrawn="1">
           <p15:clr>
             <a:srgbClr val="A4A3A4"/>
           </p15:clr>
@@ -2938,8 +2939,8 @@
         </p:nvSpPr>
         <p:spPr>
           <a:xfrm>
-            <a:off x="5332095" y="2372995"/>
-            <a:ext cx="3294380" cy="2225040"/>
+            <a:off x="4337685" y="4340225"/>
+            <a:ext cx="3363595" cy="2303145"/>
           </a:xfrm>
           <a:prstGeom prst="flowChartProcess">
             <a:avLst/>
@@ -2988,7 +2989,7 @@
         </p:nvSpPr>
         <p:spPr>
           <a:xfrm>
-            <a:off x="7117715" y="3564890"/>
+            <a:off x="6192520" y="5532120"/>
             <a:ext cx="1244600" cy="494030"/>
           </a:xfrm>
           <a:prstGeom prst="roundRect">
@@ -3038,8 +3039,8 @@
         </p:nvSpPr>
         <p:spPr>
           <a:xfrm>
-            <a:off x="1981200" y="2366010"/>
-            <a:ext cx="3281045" cy="2225675"/>
+            <a:off x="712470" y="1891030"/>
+            <a:ext cx="3405505" cy="2225675"/>
           </a:xfrm>
           <a:prstGeom prst="flowChartProcess">
             <a:avLst/>
@@ -3080,8 +3081,8 @@
         </p:nvSpPr>
         <p:spPr>
           <a:xfrm>
-            <a:off x="1979930" y="1934845"/>
-            <a:ext cx="3282315" cy="428625"/>
+            <a:off x="711200" y="1459865"/>
+            <a:ext cx="3407410" cy="428625"/>
           </a:xfrm>
           <a:prstGeom prst="round2SameRect">
             <a:avLst/>
@@ -3132,7 +3133,7 @@
         </p:nvSpPr>
         <p:spPr>
           <a:xfrm>
-            <a:off x="2096770" y="3283585"/>
+            <a:off x="828040" y="2808605"/>
             <a:ext cx="1095375" cy="377190"/>
           </a:xfrm>
           <a:prstGeom prst="flowChartAlternateProcess">
@@ -3245,7 +3246,7 @@
         </p:nvSpPr>
         <p:spPr>
           <a:xfrm>
-            <a:off x="3787775" y="2663190"/>
+            <a:off x="2519045" y="2188210"/>
             <a:ext cx="1074420" cy="245745"/>
           </a:xfrm>
           <a:prstGeom prst="flowChartProcess">
@@ -3290,7 +3291,7 @@
         </p:nvSpPr>
         <p:spPr>
           <a:xfrm>
-            <a:off x="3787775" y="3178175"/>
+            <a:off x="2519045" y="2703195"/>
             <a:ext cx="630555" cy="245745"/>
           </a:xfrm>
           <a:prstGeom prst="flowChartProcess">
@@ -3332,7 +3333,7 @@
         </p:nvSpPr>
         <p:spPr>
           <a:xfrm>
-            <a:off x="3787775" y="3605530"/>
+            <a:off x="2519045" y="3130550"/>
             <a:ext cx="219075" cy="265430"/>
           </a:xfrm>
           <a:prstGeom prst="flowChartProcess">
@@ -3379,7 +3380,7 @@
         </p:nvSpPr>
         <p:spPr>
           <a:xfrm>
-            <a:off x="3787775" y="4052570"/>
+            <a:off x="2519045" y="3577590"/>
             <a:ext cx="81280" cy="277495"/>
           </a:xfrm>
           <a:prstGeom prst="flowChartProcess">
@@ -3421,7 +3422,7 @@
         </p:nvSpPr>
         <p:spPr>
           <a:xfrm>
-            <a:off x="3258185" y="3423920"/>
+            <a:off x="1989455" y="2948940"/>
             <a:ext cx="208280" cy="158750"/>
           </a:xfrm>
           <a:prstGeom prst="rightArrow">
@@ -3460,7 +3461,7 @@
         </p:nvSpPr>
         <p:spPr>
           <a:xfrm>
-            <a:off x="2112645" y="2695575"/>
+            <a:off x="843915" y="2220595"/>
             <a:ext cx="1096010" cy="377190"/>
           </a:xfrm>
           <a:prstGeom prst="flowChartAlternateProcess">
@@ -3567,7 +3568,7 @@
         </p:nvSpPr>
         <p:spPr>
           <a:xfrm>
-            <a:off x="2112645" y="3870960"/>
+            <a:off x="843915" y="3395980"/>
             <a:ext cx="1095375" cy="377190"/>
           </a:xfrm>
           <a:prstGeom prst="flowChartAlternateProcess">
@@ -3680,7 +3681,7 @@
         </p:nvSpPr>
         <p:spPr>
           <a:xfrm>
-            <a:off x="3466465" y="2695575"/>
+            <a:off x="2197735" y="2220595"/>
             <a:ext cx="204470" cy="222250"/>
           </a:xfrm>
           <a:prstGeom prst="rect">
@@ -3710,7 +3711,7 @@
         </p:nvSpPr>
         <p:spPr>
           <a:xfrm>
-            <a:off x="3466465" y="3178175"/>
+            <a:off x="2197735" y="2703195"/>
             <a:ext cx="204470" cy="222250"/>
           </a:xfrm>
           <a:prstGeom prst="rect">
@@ -3740,7 +3741,7 @@
         </p:nvSpPr>
         <p:spPr>
           <a:xfrm>
-            <a:off x="3466465" y="3605530"/>
+            <a:off x="2197735" y="3130550"/>
             <a:ext cx="204470" cy="222250"/>
           </a:xfrm>
           <a:prstGeom prst="rect">
@@ -3770,7 +3771,7 @@
         </p:nvSpPr>
         <p:spPr>
           <a:xfrm>
-            <a:off x="3258185" y="4067810"/>
+            <a:off x="1989455" y="3592830"/>
             <a:ext cx="631190" cy="258445"/>
           </a:xfrm>
           <a:prstGeom prst="rect">
@@ -3800,7 +3801,7 @@
         </p:nvSpPr>
         <p:spPr>
           <a:xfrm>
-            <a:off x="4862195" y="2653030"/>
+            <a:off x="3593465" y="2188210"/>
             <a:ext cx="462915" cy="245745"/>
           </a:xfrm>
           <a:prstGeom prst="rect">
@@ -3829,7 +3830,7 @@
         </p:nvSpPr>
         <p:spPr>
           <a:xfrm>
-            <a:off x="4862195" y="3157220"/>
+            <a:off x="3593465" y="2695575"/>
             <a:ext cx="462915" cy="245745"/>
           </a:xfrm>
           <a:prstGeom prst="rect">
@@ -3858,7 +3859,7 @@
         </p:nvSpPr>
         <p:spPr>
           <a:xfrm>
-            <a:off x="4862195" y="3627755"/>
+            <a:off x="3593465" y="3120390"/>
             <a:ext cx="462915" cy="245745"/>
           </a:xfrm>
           <a:prstGeom prst="rect">
@@ -3887,7 +3888,7 @@
         </p:nvSpPr>
         <p:spPr>
           <a:xfrm>
-            <a:off x="4862195" y="4084955"/>
+            <a:off x="3593465" y="3581400"/>
             <a:ext cx="462915" cy="245745"/>
           </a:xfrm>
           <a:prstGeom prst="rect">
@@ -3916,8 +3917,8 @@
         </p:nvSpPr>
         <p:spPr>
           <a:xfrm>
-            <a:off x="5325110" y="1935480"/>
-            <a:ext cx="3301365" cy="427990"/>
+            <a:off x="4337685" y="3902710"/>
+            <a:ext cx="3363595" cy="427990"/>
           </a:xfrm>
           <a:prstGeom prst="round2SameRect">
             <a:avLst/>
@@ -3975,7 +3976,7 @@
         </p:nvSpPr>
         <p:spPr>
           <a:xfrm>
-            <a:off x="6762115" y="3350260"/>
+            <a:off x="5836920" y="5317490"/>
             <a:ext cx="199390" cy="158750"/>
           </a:xfrm>
           <a:prstGeom prst="rightArrow">
@@ -4019,7 +4020,7 @@
         </p:nvSpPr>
         <p:spPr>
           <a:xfrm>
-            <a:off x="5629275" y="2821305"/>
+            <a:off x="4704080" y="4788535"/>
             <a:ext cx="1053465" cy="434975"/>
           </a:xfrm>
           <a:prstGeom prst="flowChartAlternateProcess">
@@ -4093,7 +4094,7 @@
         </p:nvSpPr>
         <p:spPr>
           <a:xfrm>
-            <a:off x="5629275" y="3611880"/>
+            <a:off x="4704080" y="5579110"/>
             <a:ext cx="1053465" cy="434975"/>
           </a:xfrm>
           <a:prstGeom prst="flowChartAlternateProcess">
@@ -4167,7 +4168,7 @@
         </p:nvSpPr>
         <p:spPr>
           <a:xfrm>
-            <a:off x="7117715" y="2762250"/>
+            <a:off x="6192520" y="4729480"/>
             <a:ext cx="1244600" cy="494030"/>
           </a:xfrm>
           <a:prstGeom prst="roundRect">
@@ -4217,7 +4218,7 @@
         </p:nvSpPr>
         <p:spPr>
           <a:xfrm>
-            <a:off x="7163435" y="2821305"/>
+            <a:off x="6238240" y="4788535"/>
             <a:ext cx="1198880" cy="428625"/>
           </a:xfrm>
           <a:prstGeom prst="rect">
@@ -4250,7 +4251,7 @@
         </p:nvSpPr>
         <p:spPr>
           <a:xfrm>
-            <a:off x="7163435" y="3589020"/>
+            <a:off x="6238240" y="5556250"/>
             <a:ext cx="1198880" cy="428625"/>
           </a:xfrm>
           <a:prstGeom prst="rect">
@@ -4283,8 +4284,8 @@
         </p:nvSpPr>
         <p:spPr>
           <a:xfrm>
-            <a:off x="8719185" y="2395855"/>
-            <a:ext cx="3343910" cy="2198370"/>
+            <a:off x="7920990" y="1888490"/>
+            <a:ext cx="3428365" cy="2198370"/>
           </a:xfrm>
           <a:prstGeom prst="flowChartProcess">
             <a:avLst/>
@@ -4333,8 +4334,8 @@
         </p:nvSpPr>
         <p:spPr>
           <a:xfrm>
-            <a:off x="8728075" y="1935480"/>
-            <a:ext cx="3343910" cy="462280"/>
+            <a:off x="7916545" y="1428115"/>
+            <a:ext cx="3438525" cy="462280"/>
           </a:xfrm>
           <a:prstGeom prst="round2SameRect">
             <a:avLst/>
@@ -4388,7 +4389,7 @@
         </p:nvSpPr>
         <p:spPr>
           <a:xfrm>
-            <a:off x="10113645" y="3346450"/>
+            <a:off x="9315450" y="2839085"/>
             <a:ext cx="201930" cy="158750"/>
           </a:xfrm>
           <a:prstGeom prst="rightArrow">
@@ -4432,8 +4433,8 @@
         </p:nvSpPr>
         <p:spPr>
           <a:xfrm>
-            <a:off x="398145" y="1927225"/>
-            <a:ext cx="1216025" cy="468630"/>
+            <a:off x="5346065" y="1710055"/>
+            <a:ext cx="1216025" cy="329565"/>
           </a:xfrm>
           <a:prstGeom prst="rect">
             <a:avLst/>
@@ -4462,7 +4463,7 @@
         </p:nvSpPr>
         <p:spPr>
           <a:xfrm>
-            <a:off x="8812530" y="3202940"/>
+            <a:off x="7999095" y="2695575"/>
             <a:ext cx="1259205" cy="424815"/>
           </a:xfrm>
           <a:prstGeom prst="flowChartAlternateProcess">
@@ -4544,7 +4545,7 @@
         </p:nvSpPr>
         <p:spPr>
           <a:xfrm>
-            <a:off x="10357485" y="2733675"/>
+            <a:off x="9559290" y="2226310"/>
             <a:ext cx="1633220" cy="1379220"/>
           </a:xfrm>
           <a:prstGeom prst="roundRect">
@@ -4594,7 +4595,7 @@
         </p:nvSpPr>
         <p:spPr>
           <a:xfrm>
-            <a:off x="10508615" y="2839085"/>
+            <a:off x="9710420" y="2331720"/>
             <a:ext cx="1339850" cy="1143635"/>
           </a:xfrm>
           <a:prstGeom prst="rect">
@@ -4726,14 +4727,2242 @@
         </p:blipFill>
         <p:spPr>
           <a:xfrm>
-            <a:off x="296545" y="2517775"/>
-            <a:ext cx="1518920" cy="2076450"/>
+            <a:off x="5469890" y="1963420"/>
+            <a:ext cx="968375" cy="1324610"/>
           </a:xfrm>
           <a:prstGeom prst="rect">
             <a:avLst/>
           </a:prstGeom>
         </p:spPr>
       </p:pic>
+      <p:pic>
+        <p:nvPicPr>
+          <p:cNvPr id="3" name="图片 2" descr="LLM"/>
+          <p:cNvPicPr>
+            <a:picLocks noChangeAspect="1"/>
+          </p:cNvPicPr>
+          <p:nvPr/>
+        </p:nvPicPr>
+        <p:blipFill>
+          <a:blip r:embed="rId2"/>
+          <a:stretch>
+            <a:fillRect/>
+          </a:stretch>
+        </p:blipFill>
+        <p:spPr>
+          <a:xfrm>
+            <a:off x="5452110" y="137795"/>
+            <a:ext cx="986155" cy="986155"/>
+          </a:xfrm>
+          <a:prstGeom prst="rect">
+            <a:avLst/>
+          </a:prstGeom>
+        </p:spPr>
+      </p:pic>
+      <p:sp>
+        <p:nvSpPr>
+          <p:cNvPr id="9" name="下箭头标注 8"/>
+          <p:cNvSpPr/>
+          <p:nvPr/>
+        </p:nvSpPr>
+        <p:spPr>
+          <a:xfrm>
+            <a:off x="5608955" y="1167130"/>
+            <a:ext cx="670560" cy="499745"/>
+          </a:xfrm>
+          <a:prstGeom prst="downArrowCallout">
+            <a:avLst/>
+          </a:prstGeom>
+          <a:solidFill>
+            <a:schemeClr val="accent6"/>
+          </a:solidFill>
+          <a:ln>
+            <a:solidFill>
+              <a:schemeClr val="accent6"/>
+            </a:solidFill>
+          </a:ln>
+        </p:spPr>
+        <p:style>
+          <a:lnRef idx="2">
+            <a:schemeClr val="accent1">
+              <a:lumMod val="75000"/>
+            </a:schemeClr>
+          </a:lnRef>
+          <a:fillRef idx="1">
+            <a:schemeClr val="accent1"/>
+          </a:fillRef>
+          <a:effectRef idx="0">
+            <a:srgbClr val="FFFFFF"/>
+          </a:effectRef>
+          <a:fontRef idx="minor">
+            <a:schemeClr val="lt1"/>
+          </a:fontRef>
+        </p:style>
+        <p:txBody>
+          <a:bodyPr rtlCol="0" anchor="ctr"/>
+          <a:p>
+            <a:pPr algn="ctr"/>
+            <a:r>
+              <a:rPr lang="en-US" altLang="zh-CN" sz="900" b="1"/>
+              <a:t>Recognize</a:t>
+            </a:r>
+            <a:endParaRPr lang="en-US" altLang="zh-CN" sz="900" b="1"/>
+          </a:p>
+        </p:txBody>
+      </p:sp>
+      <p:sp>
+        <p:nvSpPr>
+          <p:cNvPr id="10" name="下箭头标注 9"/>
+          <p:cNvSpPr/>
+          <p:nvPr/>
+        </p:nvSpPr>
+        <p:spPr>
+          <a:xfrm rot="16200000">
+            <a:off x="6625590" y="2406015"/>
+            <a:ext cx="703580" cy="480060"/>
+          </a:xfrm>
+          <a:prstGeom prst="downArrowCallout">
+            <a:avLst/>
+          </a:prstGeom>
+          <a:solidFill>
+            <a:srgbClr val="843F0B"/>
+          </a:solidFill>
+          <a:ln>
+            <a:solidFill>
+              <a:srgbClr val="843F0B"/>
+            </a:solidFill>
+          </a:ln>
+        </p:spPr>
+        <p:style>
+          <a:lnRef idx="2">
+            <a:schemeClr val="accent1">
+              <a:lumMod val="75000"/>
+            </a:schemeClr>
+          </a:lnRef>
+          <a:fillRef idx="1">
+            <a:schemeClr val="accent1"/>
+          </a:fillRef>
+          <a:effectRef idx="0">
+            <a:srgbClr val="FFFFFF"/>
+          </a:effectRef>
+          <a:fontRef idx="minor">
+            <a:schemeClr val="lt1"/>
+          </a:fontRef>
+        </p:style>
+        <p:txBody>
+          <a:bodyPr rtlCol="0" anchor="ctr"/>
+          <a:p>
+            <a:pPr algn="ctr"/>
+            <a:r>
+              <a:rPr lang="en-US" altLang="zh-CN" sz="900" b="1"/>
+              <a:t>answer</a:t>
+            </a:r>
+            <a:endParaRPr lang="en-US" altLang="zh-CN" sz="900" b="1"/>
+          </a:p>
+        </p:txBody>
+      </p:sp>
+      <p:sp>
+        <p:nvSpPr>
+          <p:cNvPr id="15" name="下箭头标注 14"/>
+          <p:cNvSpPr/>
+          <p:nvPr/>
+        </p:nvSpPr>
+        <p:spPr>
+          <a:xfrm rot="5400000">
+            <a:off x="4578985" y="2406015"/>
+            <a:ext cx="703580" cy="480060"/>
+          </a:xfrm>
+          <a:prstGeom prst="downArrowCallout">
+            <a:avLst/>
+          </a:prstGeom>
+          <a:solidFill>
+            <a:schemeClr val="accent1"/>
+          </a:solidFill>
+        </p:spPr>
+        <p:style>
+          <a:lnRef idx="2">
+            <a:schemeClr val="accent1">
+              <a:lumMod val="75000"/>
+            </a:schemeClr>
+          </a:lnRef>
+          <a:fillRef idx="1">
+            <a:schemeClr val="accent1"/>
+          </a:fillRef>
+          <a:effectRef idx="0">
+            <a:srgbClr val="FFFFFF"/>
+          </a:effectRef>
+          <a:fontRef idx="minor">
+            <a:schemeClr val="lt1"/>
+          </a:fontRef>
+        </p:style>
+        <p:txBody>
+          <a:bodyPr rtlCol="0" anchor="ctr"/>
+          <a:p>
+            <a:pPr algn="ctr"/>
+            <a:r>
+              <a:rPr lang="en-US" altLang="zh-CN" sz="900" b="1"/>
+              <a:t>answer</a:t>
+            </a:r>
+            <a:endParaRPr lang="en-US" altLang="zh-CN" sz="900" b="1"/>
+          </a:p>
+        </p:txBody>
+      </p:sp>
+      <p:sp>
+        <p:nvSpPr>
+          <p:cNvPr id="16" name="下箭头标注 15"/>
+          <p:cNvSpPr/>
+          <p:nvPr/>
+        </p:nvSpPr>
+        <p:spPr>
+          <a:xfrm>
+            <a:off x="5607050" y="3390265"/>
+            <a:ext cx="703580" cy="480060"/>
+          </a:xfrm>
+          <a:prstGeom prst="downArrowCallout">
+            <a:avLst/>
+          </a:prstGeom>
+          <a:solidFill>
+            <a:schemeClr val="accent4"/>
+          </a:solidFill>
+          <a:ln>
+            <a:solidFill>
+              <a:schemeClr val="accent4"/>
+            </a:solidFill>
+          </a:ln>
+        </p:spPr>
+        <p:style>
+          <a:lnRef idx="2">
+            <a:schemeClr val="accent1">
+              <a:lumMod val="75000"/>
+            </a:schemeClr>
+          </a:lnRef>
+          <a:fillRef idx="1">
+            <a:schemeClr val="accent1"/>
+          </a:fillRef>
+          <a:effectRef idx="0">
+            <a:srgbClr val="FFFFFF"/>
+          </a:effectRef>
+          <a:fontRef idx="minor">
+            <a:schemeClr val="lt1"/>
+          </a:fontRef>
+        </p:style>
+        <p:txBody>
+          <a:bodyPr rtlCol="0" anchor="ctr"/>
+          <a:p>
+            <a:pPr algn="ctr"/>
+            <a:r>
+              <a:rPr lang="en-US" altLang="zh-CN" sz="900" b="1"/>
+              <a:t>answer</a:t>
+            </a:r>
+            <a:endParaRPr lang="en-US" altLang="zh-CN" sz="900" b="1"/>
+          </a:p>
+        </p:txBody>
+      </p:sp>
+    </p:spTree>
+  </p:cSld>
+  <p:clrMapOvr>
+    <a:masterClrMapping/>
+  </p:clrMapOvr>
+</p:sld>
+</file>
+
+<file path=ppt/slides/slide2.xml><?xml version="1.0" encoding="utf-8"?>
+<p:sld xmlns:a="http://schemas.openxmlformats.org/drawingml/2006/main" xmlns:r="http://schemas.openxmlformats.org/officeDocument/2006/relationships" xmlns:p="http://schemas.openxmlformats.org/presentationml/2006/main">
+  <p:cSld>
+    <p:spTree>
+      <p:nvGrpSpPr>
+        <p:cNvPr id="1" name=""/>
+        <p:cNvGrpSpPr/>
+        <p:nvPr/>
+      </p:nvGrpSpPr>
+      <p:grpSpPr/>
+      <p:sp>
+        <p:nvSpPr>
+          <p:cNvPr id="44" name="流程图: 过程 43"/>
+          <p:cNvSpPr/>
+          <p:nvPr/>
+        </p:nvSpPr>
+        <p:spPr>
+          <a:xfrm>
+            <a:off x="4254500" y="4342130"/>
+            <a:ext cx="3363595" cy="2303145"/>
+          </a:xfrm>
+          <a:prstGeom prst="flowChartProcess">
+            <a:avLst/>
+          </a:prstGeom>
+          <a:solidFill>
+            <a:schemeClr val="bg1"/>
+          </a:solidFill>
+          <a:ln>
+            <a:solidFill>
+              <a:schemeClr val="accent4">
+                <a:lumMod val="20000"/>
+                <a:lumOff val="80000"/>
+              </a:schemeClr>
+            </a:solidFill>
+          </a:ln>
+        </p:spPr>
+        <p:style>
+          <a:lnRef idx="2">
+            <a:schemeClr val="accent1">
+              <a:lumMod val="75000"/>
+            </a:schemeClr>
+          </a:lnRef>
+          <a:fillRef idx="1">
+            <a:schemeClr val="accent1"/>
+          </a:fillRef>
+          <a:effectRef idx="0">
+            <a:srgbClr val="FFFFFF"/>
+          </a:effectRef>
+          <a:fontRef idx="minor">
+            <a:schemeClr val="lt1"/>
+          </a:fontRef>
+        </p:style>
+        <p:txBody>
+          <a:bodyPr rtlCol="0" anchor="ctr"/>
+          <a:p>
+            <a:pPr algn="ctr"/>
+            <a:endParaRPr lang="zh-CN" altLang="en-US"/>
+          </a:p>
+        </p:txBody>
+      </p:sp>
+      <p:sp>
+        <p:nvSpPr>
+          <p:cNvPr id="2" name="圆角矩形 1"/>
+          <p:cNvSpPr/>
+          <p:nvPr/>
+        </p:nvSpPr>
+        <p:spPr>
+          <a:xfrm>
+            <a:off x="6192520" y="5532120"/>
+            <a:ext cx="1244600" cy="494030"/>
+          </a:xfrm>
+          <a:prstGeom prst="roundRect">
+            <a:avLst/>
+          </a:prstGeom>
+          <a:solidFill>
+            <a:schemeClr val="bg1"/>
+          </a:solidFill>
+          <a:ln>
+            <a:solidFill>
+              <a:schemeClr val="accent4">
+                <a:lumMod val="20000"/>
+                <a:lumOff val="80000"/>
+              </a:schemeClr>
+            </a:solidFill>
+          </a:ln>
+        </p:spPr>
+        <p:style>
+          <a:lnRef idx="2">
+            <a:schemeClr val="accent1">
+              <a:lumMod val="75000"/>
+            </a:schemeClr>
+          </a:lnRef>
+          <a:fillRef idx="1">
+            <a:schemeClr val="accent1"/>
+          </a:fillRef>
+          <a:effectRef idx="0">
+            <a:srgbClr val="FFFFFF"/>
+          </a:effectRef>
+          <a:fontRef idx="minor">
+            <a:schemeClr val="lt1"/>
+          </a:fontRef>
+        </p:style>
+        <p:txBody>
+          <a:bodyPr rtlCol="0" anchor="ctr"/>
+          <a:p>
+            <a:pPr algn="ctr"/>
+            <a:endParaRPr lang="zh-CN" altLang="en-US"/>
+          </a:p>
+        </p:txBody>
+      </p:sp>
+      <p:sp>
+        <p:nvSpPr>
+          <p:cNvPr id="6" name="流程图: 过程 5"/>
+          <p:cNvSpPr/>
+          <p:nvPr/>
+        </p:nvSpPr>
+        <p:spPr>
+          <a:xfrm>
+            <a:off x="459105" y="4417695"/>
+            <a:ext cx="3405505" cy="2225675"/>
+          </a:xfrm>
+          <a:prstGeom prst="flowChartProcess">
+            <a:avLst/>
+          </a:prstGeom>
+          <a:solidFill>
+            <a:schemeClr val="bg1"/>
+          </a:solidFill>
+        </p:spPr>
+        <p:style>
+          <a:lnRef idx="2">
+            <a:schemeClr val="accent1">
+              <a:lumMod val="75000"/>
+            </a:schemeClr>
+          </a:lnRef>
+          <a:fillRef idx="1">
+            <a:schemeClr val="accent1"/>
+          </a:fillRef>
+          <a:effectRef idx="0">
+            <a:srgbClr val="FFFFFF"/>
+          </a:effectRef>
+          <a:fontRef idx="minor">
+            <a:schemeClr val="lt1"/>
+          </a:fontRef>
+        </p:style>
+        <p:txBody>
+          <a:bodyPr rtlCol="0" anchor="ctr"/>
+          <a:p>
+            <a:pPr algn="ctr"/>
+            <a:endParaRPr lang="zh-CN" altLang="en-US"/>
+          </a:p>
+        </p:txBody>
+      </p:sp>
+      <p:sp>
+        <p:nvSpPr>
+          <p:cNvPr id="7" name="同侧圆角矩形 6"/>
+          <p:cNvSpPr/>
+          <p:nvPr/>
+        </p:nvSpPr>
+        <p:spPr>
+          <a:xfrm>
+            <a:off x="457835" y="3986530"/>
+            <a:ext cx="3407410" cy="428625"/>
+          </a:xfrm>
+          <a:prstGeom prst="round2SameRect">
+            <a:avLst/>
+          </a:prstGeom>
+          <a:solidFill>
+            <a:schemeClr val="accent1">
+              <a:lumMod val="75000"/>
+            </a:schemeClr>
+          </a:solidFill>
+        </p:spPr>
+        <p:style>
+          <a:lnRef idx="2">
+            <a:schemeClr val="accent1">
+              <a:lumMod val="75000"/>
+            </a:schemeClr>
+          </a:lnRef>
+          <a:fillRef idx="1">
+            <a:schemeClr val="accent1"/>
+          </a:fillRef>
+          <a:effectRef idx="0">
+            <a:srgbClr val="FFFFFF"/>
+          </a:effectRef>
+          <a:fontRef idx="minor">
+            <a:schemeClr val="lt1"/>
+          </a:fontRef>
+        </p:style>
+        <p:txBody>
+          <a:bodyPr rtlCol="0" anchor="ctr"/>
+          <a:p>
+            <a:pPr algn="ctr"/>
+            <a:r>
+              <a:rPr lang="en-US" altLang="zh-CN" sz="1200" b="1"/>
+              <a:t>Task 1 Chassifier Choice</a:t>
+            </a:r>
+            <a:r>
+              <a:rPr lang="en-US" altLang="zh-CN"/>
+              <a:t> </a:t>
+            </a:r>
+            <a:endParaRPr lang="zh-CN" altLang="en-US"/>
+          </a:p>
+        </p:txBody>
+      </p:sp>
+      <p:sp>
+        <p:nvSpPr>
+          <p:cNvPr id="13" name="流程图: 可选过程 12"/>
+          <p:cNvSpPr/>
+          <p:nvPr/>
+        </p:nvSpPr>
+        <p:spPr>
+          <a:xfrm>
+            <a:off x="574675" y="5335270"/>
+            <a:ext cx="1095375" cy="377190"/>
+          </a:xfrm>
+          <a:prstGeom prst="flowChartAlternateProcess">
+            <a:avLst/>
+          </a:prstGeom>
+          <a:solidFill>
+            <a:schemeClr val="accent1">
+              <a:lumMod val="20000"/>
+              <a:lumOff val="80000"/>
+            </a:schemeClr>
+          </a:solidFill>
+        </p:spPr>
+        <p:style>
+          <a:lnRef idx="2">
+            <a:schemeClr val="accent1">
+              <a:lumMod val="75000"/>
+            </a:schemeClr>
+          </a:lnRef>
+          <a:fillRef idx="1">
+            <a:schemeClr val="accent1"/>
+          </a:fillRef>
+          <a:effectRef idx="0">
+            <a:srgbClr val="FFFFFF"/>
+          </a:effectRef>
+          <a:fontRef idx="minor">
+            <a:schemeClr val="lt1"/>
+          </a:fontRef>
+        </p:style>
+        <p:txBody>
+          <a:bodyPr rtlCol="0" anchor="ctr"/>
+          <a:p>
+            <a:pPr algn="ctr"/>
+            <a:r>
+              <a:rPr lang="en-US" altLang="zh-CN" sz="900" b="1">
+                <a:solidFill>
+                  <a:schemeClr val="tx1"/>
+                </a:solidFill>
+                <a:latin typeface="Calibri" panose="020F0502020204030204" charset="0"/>
+                <a:ea typeface="微软雅黑" panose="020B0503020204020204" charset="-122"/>
+                <a:cs typeface="Calibri" panose="020F0502020204030204" charset="0"/>
+                <a:sym typeface="+mn-ea"/>
+              </a:rPr>
+              <a:t>Basic</a:t>
+            </a:r>
+            <a:endParaRPr lang="en-US" altLang="zh-CN" sz="900" b="1">
+              <a:solidFill>
+                <a:schemeClr val="tx1"/>
+              </a:solidFill>
+              <a:latin typeface="Calibri" panose="020F0502020204030204" charset="0"/>
+              <a:ea typeface="微软雅黑" panose="020B0503020204020204" charset="-122"/>
+              <a:cs typeface="Calibri" panose="020F0502020204030204" charset="0"/>
+              <a:sym typeface="+mn-ea"/>
+            </a:endParaRPr>
+          </a:p>
+          <a:p>
+            <a:pPr algn="ctr"/>
+            <a:r>
+              <a:rPr lang="zh-CN" altLang="en-US" sz="900" b="1">
+                <a:solidFill>
+                  <a:schemeClr val="tx1"/>
+                </a:solidFill>
+                <a:latin typeface="Calibri" panose="020F0502020204030204" charset="0"/>
+                <a:ea typeface="微软雅黑" panose="020B0503020204020204" charset="-122"/>
+                <a:cs typeface="Calibri" panose="020F0502020204030204" charset="0"/>
+                <a:sym typeface="+mn-ea"/>
+              </a:rPr>
+              <a:t>一</a:t>
+            </a:r>
+            <a:r>
+              <a:rPr lang="en-US" altLang="zh-CN" sz="900" b="1">
+                <a:solidFill>
+                  <a:schemeClr val="tx1"/>
+                </a:solidFill>
+                <a:latin typeface="Calibri" panose="020F0502020204030204" charset="0"/>
+                <a:ea typeface="微软雅黑" panose="020B0503020204020204" charset="-122"/>
+                <a:cs typeface="Calibri" panose="020F0502020204030204" charset="0"/>
+                <a:sym typeface="+mn-ea"/>
+              </a:rPr>
+              <a:t>___</a:t>
+            </a:r>
+            <a:r>
+              <a:rPr lang="zh-CN" altLang="en-US" sz="900" b="1">
+                <a:solidFill>
+                  <a:schemeClr val="tx1"/>
+                </a:solidFill>
+                <a:latin typeface="Calibri" panose="020F0502020204030204" charset="0"/>
+                <a:ea typeface="微软雅黑" panose="020B0503020204020204" charset="-122"/>
+                <a:cs typeface="Calibri" panose="020F0502020204030204" charset="0"/>
+                <a:sym typeface="+mn-ea"/>
+              </a:rPr>
+              <a:t>外套</a:t>
+            </a:r>
+            <a:endParaRPr lang="zh-CN" altLang="en-US" sz="900" b="1">
+              <a:solidFill>
+                <a:schemeClr val="tx1"/>
+              </a:solidFill>
+              <a:latin typeface="Calibri" panose="020F0502020204030204" charset="0"/>
+              <a:ea typeface="微软雅黑" panose="020B0503020204020204" charset="-122"/>
+              <a:cs typeface="Calibri" panose="020F0502020204030204" charset="0"/>
+              <a:sym typeface="+mn-ea"/>
+            </a:endParaRPr>
+          </a:p>
+        </p:txBody>
+      </p:sp>
+      <p:sp>
+        <p:nvSpPr>
+          <p:cNvPr id="18" name="流程图: 过程 17"/>
+          <p:cNvSpPr/>
+          <p:nvPr/>
+        </p:nvSpPr>
+        <p:spPr>
+          <a:xfrm>
+            <a:off x="2265680" y="4714875"/>
+            <a:ext cx="1074420" cy="245745"/>
+          </a:xfrm>
+          <a:prstGeom prst="flowChartProcess">
+            <a:avLst/>
+          </a:prstGeom>
+          <a:solidFill>
+            <a:schemeClr val="accent1">
+              <a:lumMod val="20000"/>
+              <a:lumOff val="80000"/>
+            </a:schemeClr>
+          </a:solidFill>
+        </p:spPr>
+        <p:style>
+          <a:lnRef idx="2">
+            <a:schemeClr val="accent1">
+              <a:lumMod val="75000"/>
+            </a:schemeClr>
+          </a:lnRef>
+          <a:fillRef idx="1">
+            <a:schemeClr val="accent1"/>
+          </a:fillRef>
+          <a:effectRef idx="0">
+            <a:srgbClr val="FFFFFF"/>
+          </a:effectRef>
+          <a:fontRef idx="minor">
+            <a:schemeClr val="lt1"/>
+          </a:fontRef>
+        </p:style>
+        <p:txBody>
+          <a:bodyPr rtlCol="0" anchor="ctr"/>
+          <a:p>
+            <a:pPr algn="ctr"/>
+            <a:endParaRPr lang="zh-CN" altLang="en-US"/>
+          </a:p>
+        </p:txBody>
+      </p:sp>
+      <p:sp>
+        <p:nvSpPr>
+          <p:cNvPr id="20" name="流程图: 过程 19"/>
+          <p:cNvSpPr/>
+          <p:nvPr/>
+        </p:nvSpPr>
+        <p:spPr>
+          <a:xfrm>
+            <a:off x="2265680" y="5229860"/>
+            <a:ext cx="630555" cy="245745"/>
+          </a:xfrm>
+          <a:prstGeom prst="flowChartProcess">
+            <a:avLst/>
+          </a:prstGeom>
+          <a:solidFill>
+            <a:schemeClr val="accent1"/>
+          </a:solidFill>
+        </p:spPr>
+        <p:style>
+          <a:lnRef idx="2">
+            <a:schemeClr val="accent1">
+              <a:lumMod val="75000"/>
+            </a:schemeClr>
+          </a:lnRef>
+          <a:fillRef idx="1">
+            <a:schemeClr val="accent1"/>
+          </a:fillRef>
+          <a:effectRef idx="0">
+            <a:srgbClr val="FFFFFF"/>
+          </a:effectRef>
+          <a:fontRef idx="minor">
+            <a:schemeClr val="lt1"/>
+          </a:fontRef>
+        </p:style>
+        <p:txBody>
+          <a:bodyPr rtlCol="0" anchor="ctr"/>
+          <a:p>
+            <a:pPr algn="ctr"/>
+            <a:endParaRPr lang="zh-CN" altLang="en-US"/>
+          </a:p>
+        </p:txBody>
+      </p:sp>
+      <p:sp>
+        <p:nvSpPr>
+          <p:cNvPr id="21" name="流程图: 过程 20"/>
+          <p:cNvSpPr/>
+          <p:nvPr/>
+        </p:nvSpPr>
+        <p:spPr>
+          <a:xfrm>
+            <a:off x="2265680" y="5657215"/>
+            <a:ext cx="219075" cy="265430"/>
+          </a:xfrm>
+          <a:prstGeom prst="flowChartProcess">
+            <a:avLst/>
+          </a:prstGeom>
+          <a:solidFill>
+            <a:schemeClr val="accent1"/>
+          </a:solidFill>
+          <a:ln>
+            <a:solidFill>
+              <a:schemeClr val="accent1"/>
+            </a:solidFill>
+          </a:ln>
+        </p:spPr>
+        <p:style>
+          <a:lnRef idx="2">
+            <a:schemeClr val="accent1">
+              <a:lumMod val="75000"/>
+            </a:schemeClr>
+          </a:lnRef>
+          <a:fillRef idx="1">
+            <a:schemeClr val="accent1"/>
+          </a:fillRef>
+          <a:effectRef idx="0">
+            <a:srgbClr val="FFFFFF"/>
+          </a:effectRef>
+          <a:fontRef idx="minor">
+            <a:schemeClr val="lt1"/>
+          </a:fontRef>
+        </p:style>
+        <p:txBody>
+          <a:bodyPr rtlCol="0" anchor="ctr"/>
+          <a:p>
+            <a:pPr algn="ctr"/>
+            <a:endParaRPr lang="zh-CN" altLang="en-US"/>
+          </a:p>
+        </p:txBody>
+      </p:sp>
+      <p:sp>
+        <p:nvSpPr>
+          <p:cNvPr id="22" name="流程图: 过程 21"/>
+          <p:cNvSpPr/>
+          <p:nvPr/>
+        </p:nvSpPr>
+        <p:spPr>
+          <a:xfrm>
+            <a:off x="2265680" y="6104255"/>
+            <a:ext cx="81280" cy="277495"/>
+          </a:xfrm>
+          <a:prstGeom prst="flowChartProcess">
+            <a:avLst/>
+          </a:prstGeom>
+          <a:solidFill>
+            <a:schemeClr val="accent1"/>
+          </a:solidFill>
+        </p:spPr>
+        <p:style>
+          <a:lnRef idx="2">
+            <a:schemeClr val="accent1">
+              <a:lumMod val="75000"/>
+            </a:schemeClr>
+          </a:lnRef>
+          <a:fillRef idx="1">
+            <a:schemeClr val="accent1"/>
+          </a:fillRef>
+          <a:effectRef idx="0">
+            <a:srgbClr val="FFFFFF"/>
+          </a:effectRef>
+          <a:fontRef idx="minor">
+            <a:schemeClr val="lt1"/>
+          </a:fontRef>
+        </p:style>
+        <p:txBody>
+          <a:bodyPr rtlCol="0" anchor="ctr"/>
+          <a:p>
+            <a:pPr algn="ctr"/>
+            <a:endParaRPr lang="zh-CN" altLang="en-US"/>
+          </a:p>
+        </p:txBody>
+      </p:sp>
+      <p:sp>
+        <p:nvSpPr>
+          <p:cNvPr id="24" name="右箭头 23"/>
+          <p:cNvSpPr/>
+          <p:nvPr/>
+        </p:nvSpPr>
+        <p:spPr>
+          <a:xfrm>
+            <a:off x="1736090" y="5475605"/>
+            <a:ext cx="208280" cy="158750"/>
+          </a:xfrm>
+          <a:prstGeom prst="rightArrow">
+            <a:avLst/>
+          </a:prstGeom>
+        </p:spPr>
+        <p:style>
+          <a:lnRef idx="2">
+            <a:schemeClr val="accent1">
+              <a:lumMod val="75000"/>
+            </a:schemeClr>
+          </a:lnRef>
+          <a:fillRef idx="1">
+            <a:schemeClr val="accent1"/>
+          </a:fillRef>
+          <a:effectRef idx="0">
+            <a:srgbClr val="FFFFFF"/>
+          </a:effectRef>
+          <a:fontRef idx="minor">
+            <a:schemeClr val="lt1"/>
+          </a:fontRef>
+        </p:style>
+        <p:txBody>
+          <a:bodyPr rtlCol="0" anchor="ctr"/>
+          <a:p>
+            <a:pPr algn="ctr"/>
+            <a:endParaRPr lang="zh-CN" altLang="en-US"/>
+          </a:p>
+        </p:txBody>
+      </p:sp>
+      <p:sp>
+        <p:nvSpPr>
+          <p:cNvPr id="31" name="流程图: 可选过程 30"/>
+          <p:cNvSpPr/>
+          <p:nvPr/>
+        </p:nvSpPr>
+        <p:spPr>
+          <a:xfrm>
+            <a:off x="590550" y="4747260"/>
+            <a:ext cx="1096010" cy="377190"/>
+          </a:xfrm>
+          <a:prstGeom prst="flowChartAlternateProcess">
+            <a:avLst/>
+          </a:prstGeom>
+          <a:solidFill>
+            <a:schemeClr val="accent1">
+              <a:lumMod val="20000"/>
+              <a:lumOff val="80000"/>
+            </a:schemeClr>
+          </a:solidFill>
+        </p:spPr>
+        <p:style>
+          <a:lnRef idx="2">
+            <a:schemeClr val="accent1">
+              <a:lumMod val="75000"/>
+            </a:schemeClr>
+          </a:lnRef>
+          <a:fillRef idx="1">
+            <a:schemeClr val="accent1"/>
+          </a:fillRef>
+          <a:effectRef idx="0">
+            <a:srgbClr val="FFFFFF"/>
+          </a:effectRef>
+          <a:fontRef idx="minor">
+            <a:schemeClr val="lt1"/>
+          </a:fontRef>
+        </p:style>
+        <p:txBody>
+          <a:bodyPr rtlCol="0" anchor="ctr"/>
+          <a:p>
+            <a:pPr algn="ctr"/>
+            <a:r>
+              <a:rPr lang="en-US" altLang="zh-CN" sz="900" b="1">
+                <a:solidFill>
+                  <a:schemeClr val="tx1"/>
+                </a:solidFill>
+                <a:latin typeface="Calibri" panose="020F0502020204030204" charset="0"/>
+                <a:ea typeface="微软雅黑" panose="020B0503020204020204" charset="-122"/>
+                <a:cs typeface="Calibri" panose="020F0502020204030204" charset="0"/>
+              </a:rPr>
+              <a:t>Superordinate</a:t>
+            </a:r>
+            <a:endParaRPr lang="zh-CN" altLang="en-US" sz="900" b="1">
+              <a:solidFill>
+                <a:schemeClr val="tx1"/>
+              </a:solidFill>
+              <a:latin typeface="Calibri" panose="020F0502020204030204" charset="0"/>
+              <a:ea typeface="微软雅黑" panose="020B0503020204020204" charset="-122"/>
+              <a:cs typeface="Calibri" panose="020F0502020204030204" charset="0"/>
+            </a:endParaRPr>
+          </a:p>
+          <a:p>
+            <a:pPr algn="ctr"/>
+            <a:r>
+              <a:rPr lang="zh-CN" altLang="en-US" sz="900" b="1">
+                <a:solidFill>
+                  <a:schemeClr val="tx1"/>
+                </a:solidFill>
+                <a:latin typeface="Calibri" panose="020F0502020204030204" charset="0"/>
+                <a:ea typeface="微软雅黑" panose="020B0503020204020204" charset="-122"/>
+                <a:cs typeface="Calibri" panose="020F0502020204030204" charset="0"/>
+              </a:rPr>
+              <a:t>一</a:t>
+            </a:r>
+            <a:r>
+              <a:rPr lang="en-US" altLang="zh-CN" sz="900" b="1">
+                <a:solidFill>
+                  <a:schemeClr val="tx1"/>
+                </a:solidFill>
+                <a:latin typeface="Calibri" panose="020F0502020204030204" charset="0"/>
+                <a:ea typeface="微软雅黑" panose="020B0503020204020204" charset="-122"/>
+                <a:cs typeface="Calibri" panose="020F0502020204030204" charset="0"/>
+              </a:rPr>
+              <a:t>___</a:t>
+            </a:r>
+            <a:r>
+              <a:rPr lang="zh-CN" altLang="en-US" sz="900" b="1">
+                <a:solidFill>
+                  <a:schemeClr val="tx1"/>
+                </a:solidFill>
+                <a:latin typeface="Calibri" panose="020F0502020204030204" charset="0"/>
+                <a:ea typeface="微软雅黑" panose="020B0503020204020204" charset="-122"/>
+                <a:cs typeface="Calibri" panose="020F0502020204030204" charset="0"/>
+              </a:rPr>
+              <a:t>衣服</a:t>
+            </a:r>
+            <a:endParaRPr lang="zh-CN" altLang="en-US" sz="900" b="1">
+              <a:solidFill>
+                <a:schemeClr val="tx1"/>
+              </a:solidFill>
+              <a:latin typeface="Calibri" panose="020F0502020204030204" charset="0"/>
+              <a:ea typeface="微软雅黑" panose="020B0503020204020204" charset="-122"/>
+              <a:cs typeface="Calibri" panose="020F0502020204030204" charset="0"/>
+            </a:endParaRPr>
+          </a:p>
+        </p:txBody>
+      </p:sp>
+      <p:sp>
+        <p:nvSpPr>
+          <p:cNvPr id="32" name="流程图: 可选过程 31"/>
+          <p:cNvSpPr/>
+          <p:nvPr/>
+        </p:nvSpPr>
+        <p:spPr>
+          <a:xfrm>
+            <a:off x="590550" y="5922645"/>
+            <a:ext cx="1095375" cy="377190"/>
+          </a:xfrm>
+          <a:prstGeom prst="flowChartAlternateProcess">
+            <a:avLst/>
+          </a:prstGeom>
+          <a:solidFill>
+            <a:schemeClr val="accent1">
+              <a:lumMod val="20000"/>
+              <a:lumOff val="80000"/>
+            </a:schemeClr>
+          </a:solidFill>
+        </p:spPr>
+        <p:style>
+          <a:lnRef idx="2">
+            <a:schemeClr val="accent1">
+              <a:lumMod val="75000"/>
+            </a:schemeClr>
+          </a:lnRef>
+          <a:fillRef idx="1">
+            <a:schemeClr val="accent1"/>
+          </a:fillRef>
+          <a:effectRef idx="0">
+            <a:srgbClr val="FFFFFF"/>
+          </a:effectRef>
+          <a:fontRef idx="minor">
+            <a:schemeClr val="lt1"/>
+          </a:fontRef>
+        </p:style>
+        <p:txBody>
+          <a:bodyPr rtlCol="0" anchor="ctr"/>
+          <a:p>
+            <a:pPr algn="ctr"/>
+            <a:r>
+              <a:rPr lang="en-US" altLang="zh-CN" sz="900" b="1">
+                <a:solidFill>
+                  <a:schemeClr val="tx1"/>
+                </a:solidFill>
+                <a:latin typeface="Calibri" panose="020F0502020204030204" charset="0"/>
+                <a:ea typeface="微软雅黑" panose="020B0503020204020204" charset="-122"/>
+                <a:cs typeface="Calibri" panose="020F0502020204030204" charset="0"/>
+                <a:sym typeface="+mn-ea"/>
+              </a:rPr>
+              <a:t>Subordinate</a:t>
+            </a:r>
+            <a:endParaRPr lang="en-US" altLang="zh-CN" sz="900" b="1">
+              <a:solidFill>
+                <a:schemeClr val="tx1"/>
+              </a:solidFill>
+              <a:latin typeface="Calibri" panose="020F0502020204030204" charset="0"/>
+              <a:ea typeface="微软雅黑" panose="020B0503020204020204" charset="-122"/>
+              <a:cs typeface="Calibri" panose="020F0502020204030204" charset="0"/>
+              <a:sym typeface="+mn-ea"/>
+            </a:endParaRPr>
+          </a:p>
+          <a:p>
+            <a:pPr algn="ctr"/>
+            <a:r>
+              <a:rPr lang="zh-CN" altLang="en-US" sz="900" b="1">
+                <a:solidFill>
+                  <a:schemeClr val="tx1"/>
+                </a:solidFill>
+                <a:latin typeface="Calibri" panose="020F0502020204030204" charset="0"/>
+                <a:ea typeface="微软雅黑" panose="020B0503020204020204" charset="-122"/>
+                <a:cs typeface="Calibri" panose="020F0502020204030204" charset="0"/>
+                <a:sym typeface="+mn-ea"/>
+              </a:rPr>
+              <a:t>一</a:t>
+            </a:r>
+            <a:r>
+              <a:rPr lang="en-US" altLang="zh-CN" sz="900" b="1">
+                <a:solidFill>
+                  <a:schemeClr val="tx1"/>
+                </a:solidFill>
+                <a:latin typeface="Calibri" panose="020F0502020204030204" charset="0"/>
+                <a:ea typeface="微软雅黑" panose="020B0503020204020204" charset="-122"/>
+                <a:cs typeface="Calibri" panose="020F0502020204030204" charset="0"/>
+                <a:sym typeface="+mn-ea"/>
+              </a:rPr>
+              <a:t>___</a:t>
+            </a:r>
+            <a:r>
+              <a:rPr lang="zh-CN" altLang="en-US" sz="900" b="1">
+                <a:solidFill>
+                  <a:schemeClr val="tx1"/>
+                </a:solidFill>
+                <a:latin typeface="Calibri" panose="020F0502020204030204" charset="0"/>
+                <a:ea typeface="微软雅黑" panose="020B0503020204020204" charset="-122"/>
+                <a:cs typeface="Calibri" panose="020F0502020204030204" charset="0"/>
+                <a:sym typeface="+mn-ea"/>
+              </a:rPr>
+              <a:t>西装</a:t>
+            </a:r>
+            <a:endParaRPr lang="zh-CN" altLang="en-US" sz="900" b="1">
+              <a:solidFill>
+                <a:schemeClr val="tx1"/>
+              </a:solidFill>
+              <a:latin typeface="Calibri" panose="020F0502020204030204" charset="0"/>
+              <a:ea typeface="微软雅黑" panose="020B0503020204020204" charset="-122"/>
+              <a:cs typeface="Calibri" panose="020F0502020204030204" charset="0"/>
+              <a:sym typeface="+mn-ea"/>
+            </a:endParaRPr>
+          </a:p>
+        </p:txBody>
+      </p:sp>
+      <p:sp>
+        <p:nvSpPr>
+          <p:cNvPr id="35" name="文本框 34"/>
+          <p:cNvSpPr txBox="1"/>
+          <p:nvPr/>
+        </p:nvSpPr>
+        <p:spPr>
+          <a:xfrm>
+            <a:off x="1944370" y="4747260"/>
+            <a:ext cx="204470" cy="222250"/>
+          </a:xfrm>
+          <a:prstGeom prst="rect">
+            <a:avLst/>
+          </a:prstGeom>
+          <a:noFill/>
+        </p:spPr>
+        <p:txBody>
+          <a:bodyPr wrap="square" rtlCol="0">
+            <a:noAutofit/>
+          </a:bodyPr>
+          <a:p>
+            <a:pPr algn="ctr"/>
+            <a:r>
+              <a:rPr lang="zh-CN" altLang="en-US" sz="1000" b="1"/>
+              <a:t>套</a:t>
+            </a:r>
+            <a:endParaRPr lang="zh-CN" altLang="en-US" sz="1000" b="1"/>
+          </a:p>
+        </p:txBody>
+      </p:sp>
+      <p:sp>
+        <p:nvSpPr>
+          <p:cNvPr id="37" name="文本框 36"/>
+          <p:cNvSpPr txBox="1"/>
+          <p:nvPr/>
+        </p:nvSpPr>
+        <p:spPr>
+          <a:xfrm>
+            <a:off x="1944370" y="5229860"/>
+            <a:ext cx="204470" cy="222250"/>
+          </a:xfrm>
+          <a:prstGeom prst="rect">
+            <a:avLst/>
+          </a:prstGeom>
+          <a:noFill/>
+        </p:spPr>
+        <p:txBody>
+          <a:bodyPr wrap="square" rtlCol="0">
+            <a:noAutofit/>
+          </a:bodyPr>
+          <a:p>
+            <a:pPr algn="ctr"/>
+            <a:r>
+              <a:rPr lang="zh-CN" altLang="en-US" sz="1000" b="1"/>
+              <a:t>件</a:t>
+            </a:r>
+            <a:endParaRPr lang="zh-CN" altLang="en-US" sz="1000" b="1"/>
+          </a:p>
+        </p:txBody>
+      </p:sp>
+      <p:sp>
+        <p:nvSpPr>
+          <p:cNvPr id="38" name="文本框 37"/>
+          <p:cNvSpPr txBox="1"/>
+          <p:nvPr/>
+        </p:nvSpPr>
+        <p:spPr>
+          <a:xfrm>
+            <a:off x="1944370" y="5657215"/>
+            <a:ext cx="204470" cy="222250"/>
+          </a:xfrm>
+          <a:prstGeom prst="rect">
+            <a:avLst/>
+          </a:prstGeom>
+          <a:noFill/>
+        </p:spPr>
+        <p:txBody>
+          <a:bodyPr wrap="square" rtlCol="0">
+            <a:noAutofit/>
+          </a:bodyPr>
+          <a:p>
+            <a:pPr algn="ctr"/>
+            <a:r>
+              <a:rPr lang="zh-CN" altLang="en-US" sz="1000" b="1"/>
+              <a:t>个</a:t>
+            </a:r>
+            <a:endParaRPr lang="zh-CN" altLang="en-US" sz="1000" b="1"/>
+          </a:p>
+        </p:txBody>
+      </p:sp>
+      <p:sp>
+        <p:nvSpPr>
+          <p:cNvPr id="39" name="文本框 38"/>
+          <p:cNvSpPr txBox="1"/>
+          <p:nvPr/>
+        </p:nvSpPr>
+        <p:spPr>
+          <a:xfrm>
+            <a:off x="1736090" y="6119495"/>
+            <a:ext cx="631190" cy="258445"/>
+          </a:xfrm>
+          <a:prstGeom prst="rect">
+            <a:avLst/>
+          </a:prstGeom>
+          <a:noFill/>
+        </p:spPr>
+        <p:txBody>
+          <a:bodyPr wrap="square" rtlCol="0">
+            <a:noAutofit/>
+          </a:bodyPr>
+          <a:p>
+            <a:pPr algn="ctr"/>
+            <a:r>
+              <a:rPr lang="zh-CN" altLang="en-US" sz="1000" b="1"/>
+              <a:t>其他</a:t>
+            </a:r>
+            <a:endParaRPr lang="zh-CN" altLang="en-US" sz="1000" b="1"/>
+          </a:p>
+        </p:txBody>
+      </p:sp>
+      <p:sp>
+        <p:nvSpPr>
+          <p:cNvPr id="40" name="文本框 39"/>
+          <p:cNvSpPr txBox="1"/>
+          <p:nvPr/>
+        </p:nvSpPr>
+        <p:spPr>
+          <a:xfrm>
+            <a:off x="3340100" y="4714875"/>
+            <a:ext cx="462915" cy="245745"/>
+          </a:xfrm>
+          <a:prstGeom prst="rect">
+            <a:avLst/>
+          </a:prstGeom>
+          <a:noFill/>
+        </p:spPr>
+        <p:txBody>
+          <a:bodyPr wrap="square" rtlCol="0">
+            <a:noAutofit/>
+          </a:bodyPr>
+          <a:p>
+            <a:r>
+              <a:rPr lang="en-US" altLang="zh-CN" sz="1000" b="1"/>
+              <a:t>60%</a:t>
+            </a:r>
+            <a:endParaRPr lang="en-US" altLang="zh-CN" sz="1000" b="1"/>
+          </a:p>
+        </p:txBody>
+      </p:sp>
+      <p:sp>
+        <p:nvSpPr>
+          <p:cNvPr id="41" name="文本框 40"/>
+          <p:cNvSpPr txBox="1"/>
+          <p:nvPr/>
+        </p:nvSpPr>
+        <p:spPr>
+          <a:xfrm>
+            <a:off x="3340100" y="5222240"/>
+            <a:ext cx="462915" cy="245745"/>
+          </a:xfrm>
+          <a:prstGeom prst="rect">
+            <a:avLst/>
+          </a:prstGeom>
+          <a:noFill/>
+        </p:spPr>
+        <p:txBody>
+          <a:bodyPr wrap="square" rtlCol="0">
+            <a:noAutofit/>
+          </a:bodyPr>
+          <a:p>
+            <a:r>
+              <a:rPr lang="en-US" altLang="zh-CN" sz="1000" b="1"/>
+              <a:t>30%</a:t>
+            </a:r>
+            <a:endParaRPr lang="en-US" altLang="zh-CN" sz="1000" b="1"/>
+          </a:p>
+        </p:txBody>
+      </p:sp>
+      <p:sp>
+        <p:nvSpPr>
+          <p:cNvPr id="42" name="文本框 41"/>
+          <p:cNvSpPr txBox="1"/>
+          <p:nvPr/>
+        </p:nvSpPr>
+        <p:spPr>
+          <a:xfrm>
+            <a:off x="3340100" y="5647055"/>
+            <a:ext cx="462915" cy="245745"/>
+          </a:xfrm>
+          <a:prstGeom prst="rect">
+            <a:avLst/>
+          </a:prstGeom>
+          <a:noFill/>
+        </p:spPr>
+        <p:txBody>
+          <a:bodyPr wrap="square" rtlCol="0">
+            <a:noAutofit/>
+          </a:bodyPr>
+          <a:p>
+            <a:r>
+              <a:rPr lang="en-US" altLang="zh-CN" sz="1000" b="1"/>
+              <a:t>8%</a:t>
+            </a:r>
+            <a:endParaRPr lang="en-US" altLang="zh-CN" sz="1000" b="1"/>
+          </a:p>
+        </p:txBody>
+      </p:sp>
+      <p:sp>
+        <p:nvSpPr>
+          <p:cNvPr id="43" name="文本框 42"/>
+          <p:cNvSpPr txBox="1"/>
+          <p:nvPr/>
+        </p:nvSpPr>
+        <p:spPr>
+          <a:xfrm>
+            <a:off x="3340100" y="6108065"/>
+            <a:ext cx="462915" cy="245745"/>
+          </a:xfrm>
+          <a:prstGeom prst="rect">
+            <a:avLst/>
+          </a:prstGeom>
+          <a:noFill/>
+        </p:spPr>
+        <p:txBody>
+          <a:bodyPr wrap="square" rtlCol="0">
+            <a:noAutofit/>
+          </a:bodyPr>
+          <a:p>
+            <a:r>
+              <a:rPr lang="en-US" altLang="zh-CN" sz="1000" b="1"/>
+              <a:t>2%</a:t>
+            </a:r>
+            <a:endParaRPr lang="en-US" altLang="zh-CN" sz="1000" b="1"/>
+          </a:p>
+        </p:txBody>
+      </p:sp>
+      <p:sp>
+        <p:nvSpPr>
+          <p:cNvPr id="45" name="同侧圆角矩形 44"/>
+          <p:cNvSpPr/>
+          <p:nvPr/>
+        </p:nvSpPr>
+        <p:spPr>
+          <a:xfrm>
+            <a:off x="4254500" y="3986530"/>
+            <a:ext cx="3363595" cy="428625"/>
+          </a:xfrm>
+          <a:prstGeom prst="round2SameRect">
+            <a:avLst/>
+          </a:prstGeom>
+          <a:solidFill>
+            <a:schemeClr val="accent4">
+              <a:lumMod val="50000"/>
+            </a:schemeClr>
+          </a:solidFill>
+          <a:ln>
+            <a:solidFill>
+              <a:schemeClr val="accent4">
+                <a:lumMod val="50000"/>
+              </a:schemeClr>
+            </a:solidFill>
+          </a:ln>
+        </p:spPr>
+        <p:style>
+          <a:lnRef idx="2">
+            <a:schemeClr val="accent1">
+              <a:lumMod val="75000"/>
+            </a:schemeClr>
+          </a:lnRef>
+          <a:fillRef idx="1">
+            <a:schemeClr val="accent1"/>
+          </a:fillRef>
+          <a:effectRef idx="0">
+            <a:srgbClr val="FFFFFF"/>
+          </a:effectRef>
+          <a:fontRef idx="minor">
+            <a:schemeClr val="lt1"/>
+          </a:fontRef>
+        </p:style>
+        <p:txBody>
+          <a:bodyPr rtlCol="0" anchor="ctr"/>
+          <a:p>
+            <a:pPr algn="ctr"/>
+            <a:r>
+              <a:rPr lang="en-US" altLang="zh-CN" sz="1200" b="1"/>
+              <a:t>Task 2 Head Noun Completion</a:t>
+            </a:r>
+            <a:r>
+              <a:rPr lang="en-US" altLang="zh-CN"/>
+              <a:t> </a:t>
+            </a:r>
+            <a:endParaRPr lang="zh-CN" altLang="en-US"/>
+          </a:p>
+        </p:txBody>
+      </p:sp>
+      <p:sp>
+        <p:nvSpPr>
+          <p:cNvPr id="53" name="右箭头 52"/>
+          <p:cNvSpPr/>
+          <p:nvPr/>
+        </p:nvSpPr>
+        <p:spPr>
+          <a:xfrm>
+            <a:off x="5836920" y="5317490"/>
+            <a:ext cx="199390" cy="158750"/>
+          </a:xfrm>
+          <a:prstGeom prst="rightArrow">
+            <a:avLst/>
+          </a:prstGeom>
+          <a:solidFill>
+            <a:schemeClr val="accent4">
+              <a:lumMod val="50000"/>
+            </a:schemeClr>
+          </a:solidFill>
+        </p:spPr>
+        <p:style>
+          <a:lnRef idx="2">
+            <a:schemeClr val="accent1">
+              <a:lumMod val="75000"/>
+            </a:schemeClr>
+          </a:lnRef>
+          <a:fillRef idx="1">
+            <a:schemeClr val="accent1"/>
+          </a:fillRef>
+          <a:effectRef idx="0">
+            <a:srgbClr val="FFFFFF"/>
+          </a:effectRef>
+          <a:fontRef idx="minor">
+            <a:schemeClr val="lt1"/>
+          </a:fontRef>
+        </p:style>
+        <p:txBody>
+          <a:bodyPr rtlCol="0" anchor="ctr"/>
+          <a:p>
+            <a:pPr algn="ctr"/>
+            <a:endParaRPr lang="zh-CN" altLang="en-US"/>
+          </a:p>
+        </p:txBody>
+      </p:sp>
+      <p:sp>
+        <p:nvSpPr>
+          <p:cNvPr id="57" name="流程图: 可选过程 56"/>
+          <p:cNvSpPr/>
+          <p:nvPr/>
+        </p:nvSpPr>
+        <p:spPr>
+          <a:xfrm>
+            <a:off x="4704080" y="4788535"/>
+            <a:ext cx="1053465" cy="434975"/>
+          </a:xfrm>
+          <a:prstGeom prst="flowChartAlternateProcess">
+            <a:avLst/>
+          </a:prstGeom>
+          <a:solidFill>
+            <a:schemeClr val="accent4">
+              <a:lumMod val="20000"/>
+              <a:lumOff val="80000"/>
+            </a:schemeClr>
+          </a:solidFill>
+        </p:spPr>
+        <p:style>
+          <a:lnRef idx="2">
+            <a:schemeClr val="accent1">
+              <a:lumMod val="75000"/>
+            </a:schemeClr>
+          </a:lnRef>
+          <a:fillRef idx="1">
+            <a:schemeClr val="accent1"/>
+          </a:fillRef>
+          <a:effectRef idx="0">
+            <a:srgbClr val="FFFFFF"/>
+          </a:effectRef>
+          <a:fontRef idx="minor">
+            <a:schemeClr val="lt1"/>
+          </a:fontRef>
+        </p:style>
+        <p:txBody>
+          <a:bodyPr rtlCol="0" anchor="ctr"/>
+          <a:p>
+            <a:pPr algn="ctr"/>
+            <a:r>
+              <a:rPr lang="zh-CN" altLang="en-US" sz="900" b="1">
+                <a:solidFill>
+                  <a:schemeClr val="tx1"/>
+                </a:solidFill>
+                <a:latin typeface="Calibri" panose="020F0502020204030204" charset="0"/>
+                <a:ea typeface="微软雅黑" panose="020B0503020204020204" charset="-122"/>
+                <a:cs typeface="Calibri" panose="020F0502020204030204" charset="0"/>
+              </a:rPr>
+              <a:t>这是一个</a:t>
+            </a:r>
+            <a:r>
+              <a:rPr lang="en-US" altLang="zh-CN" sz="900" b="1">
+                <a:solidFill>
+                  <a:schemeClr val="tx1"/>
+                </a:solidFill>
+                <a:latin typeface="Calibri" panose="020F0502020204030204" charset="0"/>
+                <a:ea typeface="微软雅黑" panose="020B0503020204020204" charset="-122"/>
+                <a:cs typeface="Calibri" panose="020F0502020204030204" charset="0"/>
+              </a:rPr>
+              <a:t> _____</a:t>
+            </a:r>
+            <a:endParaRPr lang="en-US" altLang="zh-CN" sz="900" b="1">
+              <a:solidFill>
+                <a:schemeClr val="tx1"/>
+              </a:solidFill>
+              <a:latin typeface="Calibri" panose="020F0502020204030204" charset="0"/>
+              <a:ea typeface="微软雅黑" panose="020B0503020204020204" charset="-122"/>
+              <a:cs typeface="Calibri" panose="020F0502020204030204" charset="0"/>
+            </a:endParaRPr>
+          </a:p>
+        </p:txBody>
+      </p:sp>
+      <p:sp>
+        <p:nvSpPr>
+          <p:cNvPr id="69" name="流程图: 可选过程 68"/>
+          <p:cNvSpPr/>
+          <p:nvPr/>
+        </p:nvSpPr>
+        <p:spPr>
+          <a:xfrm>
+            <a:off x="4704080" y="5579110"/>
+            <a:ext cx="1053465" cy="434975"/>
+          </a:xfrm>
+          <a:prstGeom prst="flowChartAlternateProcess">
+            <a:avLst/>
+          </a:prstGeom>
+          <a:solidFill>
+            <a:schemeClr val="accent4">
+              <a:lumMod val="20000"/>
+              <a:lumOff val="80000"/>
+            </a:schemeClr>
+          </a:solidFill>
+        </p:spPr>
+        <p:style>
+          <a:lnRef idx="2">
+            <a:schemeClr val="accent1">
+              <a:lumMod val="75000"/>
+            </a:schemeClr>
+          </a:lnRef>
+          <a:fillRef idx="1">
+            <a:schemeClr val="accent1"/>
+          </a:fillRef>
+          <a:effectRef idx="0">
+            <a:srgbClr val="FFFFFF"/>
+          </a:effectRef>
+          <a:fontRef idx="minor">
+            <a:schemeClr val="lt1"/>
+          </a:fontRef>
+        </p:style>
+        <p:txBody>
+          <a:bodyPr rtlCol="0" anchor="ctr"/>
+          <a:p>
+            <a:pPr algn="ctr"/>
+            <a:r>
+              <a:rPr lang="zh-CN" altLang="en-US" sz="900" b="1">
+                <a:solidFill>
+                  <a:schemeClr val="tx1"/>
+                </a:solidFill>
+                <a:latin typeface="Calibri" panose="020F0502020204030204" charset="0"/>
+                <a:ea typeface="微软雅黑" panose="020B0503020204020204" charset="-122"/>
+                <a:cs typeface="Calibri" panose="020F0502020204030204" charset="0"/>
+              </a:rPr>
+              <a:t>这是一件</a:t>
+            </a:r>
+            <a:r>
+              <a:rPr lang="en-US" altLang="zh-CN" sz="900" b="1">
+                <a:solidFill>
+                  <a:schemeClr val="tx1"/>
+                </a:solidFill>
+                <a:latin typeface="Calibri" panose="020F0502020204030204" charset="0"/>
+                <a:ea typeface="微软雅黑" panose="020B0503020204020204" charset="-122"/>
+                <a:cs typeface="Calibri" panose="020F0502020204030204" charset="0"/>
+              </a:rPr>
+              <a:t> _____</a:t>
+            </a:r>
+            <a:endParaRPr lang="en-US" altLang="zh-CN" sz="900" b="1">
+              <a:solidFill>
+                <a:schemeClr val="tx1"/>
+              </a:solidFill>
+              <a:latin typeface="Calibri" panose="020F0502020204030204" charset="0"/>
+              <a:ea typeface="微软雅黑" panose="020B0503020204020204" charset="-122"/>
+              <a:cs typeface="Calibri" panose="020F0502020204030204" charset="0"/>
+            </a:endParaRPr>
+          </a:p>
+        </p:txBody>
+      </p:sp>
+      <p:sp>
+        <p:nvSpPr>
+          <p:cNvPr id="72" name="圆角矩形 71"/>
+          <p:cNvSpPr/>
+          <p:nvPr/>
+        </p:nvSpPr>
+        <p:spPr>
+          <a:xfrm>
+            <a:off x="6192520" y="4729480"/>
+            <a:ext cx="1244600" cy="494030"/>
+          </a:xfrm>
+          <a:prstGeom prst="roundRect">
+            <a:avLst/>
+          </a:prstGeom>
+          <a:solidFill>
+            <a:schemeClr val="bg1"/>
+          </a:solidFill>
+          <a:ln>
+            <a:solidFill>
+              <a:schemeClr val="accent4">
+                <a:lumMod val="20000"/>
+                <a:lumOff val="80000"/>
+              </a:schemeClr>
+            </a:solidFill>
+          </a:ln>
+        </p:spPr>
+        <p:style>
+          <a:lnRef idx="2">
+            <a:schemeClr val="accent1">
+              <a:lumMod val="75000"/>
+            </a:schemeClr>
+          </a:lnRef>
+          <a:fillRef idx="1">
+            <a:schemeClr val="accent1"/>
+          </a:fillRef>
+          <a:effectRef idx="0">
+            <a:srgbClr val="FFFFFF"/>
+          </a:effectRef>
+          <a:fontRef idx="minor">
+            <a:schemeClr val="lt1"/>
+          </a:fontRef>
+        </p:style>
+        <p:txBody>
+          <a:bodyPr rtlCol="0" anchor="ctr"/>
+          <a:p>
+            <a:pPr algn="ctr"/>
+            <a:endParaRPr lang="zh-CN" altLang="en-US"/>
+          </a:p>
+        </p:txBody>
+      </p:sp>
+      <p:sp>
+        <p:nvSpPr>
+          <p:cNvPr id="73" name="文本框 72"/>
+          <p:cNvSpPr txBox="1"/>
+          <p:nvPr/>
+        </p:nvSpPr>
+        <p:spPr>
+          <a:xfrm>
+            <a:off x="6238240" y="4788535"/>
+            <a:ext cx="1198880" cy="428625"/>
+          </a:xfrm>
+          <a:prstGeom prst="rect">
+            <a:avLst/>
+          </a:prstGeom>
+          <a:noFill/>
+        </p:spPr>
+        <p:txBody>
+          <a:bodyPr wrap="square" rtlCol="0">
+            <a:noAutofit/>
+          </a:bodyPr>
+          <a:p>
+            <a:r>
+              <a:rPr lang="zh-CN" altLang="en-US" sz="900" b="1"/>
+              <a:t>西服、西装、衣服、外套</a:t>
+            </a:r>
+            <a:r>
+              <a:rPr lang="en-US" altLang="zh-CN" sz="900" b="1"/>
+              <a:t> …</a:t>
+            </a:r>
+            <a:endParaRPr lang="en-US" altLang="zh-CN" sz="900" b="1"/>
+          </a:p>
+        </p:txBody>
+      </p:sp>
+      <p:sp>
+        <p:nvSpPr>
+          <p:cNvPr id="74" name="文本框 73"/>
+          <p:cNvSpPr txBox="1"/>
+          <p:nvPr/>
+        </p:nvSpPr>
+        <p:spPr>
+          <a:xfrm>
+            <a:off x="6238240" y="5556250"/>
+            <a:ext cx="1198880" cy="428625"/>
+          </a:xfrm>
+          <a:prstGeom prst="rect">
+            <a:avLst/>
+          </a:prstGeom>
+          <a:noFill/>
+        </p:spPr>
+        <p:txBody>
+          <a:bodyPr wrap="square" rtlCol="0">
+            <a:noAutofit/>
+          </a:bodyPr>
+          <a:p>
+            <a:r>
+              <a:rPr lang="zh-CN" altLang="en-US" sz="900" b="1"/>
+              <a:t>黑色西装、西服、外套</a:t>
+            </a:r>
+            <a:r>
+              <a:rPr lang="en-US" altLang="zh-CN" sz="900" b="1"/>
+              <a:t> …</a:t>
+            </a:r>
+            <a:endParaRPr lang="en-US" altLang="zh-CN" sz="900" b="1"/>
+          </a:p>
+        </p:txBody>
+      </p:sp>
+      <p:sp>
+        <p:nvSpPr>
+          <p:cNvPr id="92" name="流程图: 过程 91"/>
+          <p:cNvSpPr/>
+          <p:nvPr/>
+        </p:nvSpPr>
+        <p:spPr>
+          <a:xfrm>
+            <a:off x="8008620" y="4446905"/>
+            <a:ext cx="3428365" cy="2198370"/>
+          </a:xfrm>
+          <a:prstGeom prst="flowChartProcess">
+            <a:avLst/>
+          </a:prstGeom>
+          <a:solidFill>
+            <a:schemeClr val="bg1"/>
+          </a:solidFill>
+          <a:ln>
+            <a:solidFill>
+              <a:schemeClr val="accent2">
+                <a:lumMod val="20000"/>
+                <a:lumOff val="80000"/>
+              </a:schemeClr>
+            </a:solidFill>
+          </a:ln>
+        </p:spPr>
+        <p:style>
+          <a:lnRef idx="2">
+            <a:schemeClr val="accent1">
+              <a:lumMod val="75000"/>
+            </a:schemeClr>
+          </a:lnRef>
+          <a:fillRef idx="1">
+            <a:schemeClr val="accent1"/>
+          </a:fillRef>
+          <a:effectRef idx="0">
+            <a:srgbClr val="FFFFFF"/>
+          </a:effectRef>
+          <a:fontRef idx="minor">
+            <a:schemeClr val="lt1"/>
+          </a:fontRef>
+        </p:style>
+        <p:txBody>
+          <a:bodyPr rtlCol="0" anchor="ctr"/>
+          <a:p>
+            <a:pPr algn="ctr"/>
+            <a:endParaRPr lang="zh-CN" altLang="en-US"/>
+          </a:p>
+        </p:txBody>
+      </p:sp>
+      <p:sp>
+        <p:nvSpPr>
+          <p:cNvPr id="93" name="同侧圆角矩形 92"/>
+          <p:cNvSpPr/>
+          <p:nvPr/>
+        </p:nvSpPr>
+        <p:spPr>
+          <a:xfrm>
+            <a:off x="8004175" y="3986530"/>
+            <a:ext cx="3438525" cy="462280"/>
+          </a:xfrm>
+          <a:prstGeom prst="round2SameRect">
+            <a:avLst/>
+          </a:prstGeom>
+          <a:solidFill>
+            <a:schemeClr val="accent2">
+              <a:lumMod val="50000"/>
+            </a:schemeClr>
+          </a:solidFill>
+          <a:ln>
+            <a:solidFill>
+              <a:schemeClr val="accent2">
+                <a:lumMod val="50000"/>
+              </a:schemeClr>
+            </a:solidFill>
+          </a:ln>
+        </p:spPr>
+        <p:style>
+          <a:lnRef idx="2">
+            <a:schemeClr val="accent1">
+              <a:lumMod val="75000"/>
+            </a:schemeClr>
+          </a:lnRef>
+          <a:fillRef idx="1">
+            <a:schemeClr val="accent1"/>
+          </a:fillRef>
+          <a:effectRef idx="0">
+            <a:srgbClr val="FFFFFF"/>
+          </a:effectRef>
+          <a:fontRef idx="minor">
+            <a:schemeClr val="lt1"/>
+          </a:fontRef>
+        </p:style>
+        <p:txBody>
+          <a:bodyPr rtlCol="0" anchor="ctr"/>
+          <a:p>
+            <a:pPr algn="ctr"/>
+            <a:r>
+              <a:rPr lang="en-US" altLang="zh-CN" sz="1200" b="1"/>
+              <a:t>Task 3 Referring Expression Generation</a:t>
+            </a:r>
+            <a:endParaRPr lang="en-US" altLang="zh-CN" sz="1200" b="1"/>
+          </a:p>
+        </p:txBody>
+      </p:sp>
+      <p:sp>
+        <p:nvSpPr>
+          <p:cNvPr id="96" name="右箭头 95"/>
+          <p:cNvSpPr/>
+          <p:nvPr/>
+        </p:nvSpPr>
+        <p:spPr>
+          <a:xfrm>
+            <a:off x="9403080" y="5397500"/>
+            <a:ext cx="201930" cy="158750"/>
+          </a:xfrm>
+          <a:prstGeom prst="rightArrow">
+            <a:avLst/>
+          </a:prstGeom>
+          <a:solidFill>
+            <a:schemeClr val="accent2">
+              <a:lumMod val="50000"/>
+            </a:schemeClr>
+          </a:solidFill>
+        </p:spPr>
+        <p:style>
+          <a:lnRef idx="2">
+            <a:schemeClr val="accent1">
+              <a:lumMod val="75000"/>
+            </a:schemeClr>
+          </a:lnRef>
+          <a:fillRef idx="1">
+            <a:schemeClr val="accent1"/>
+          </a:fillRef>
+          <a:effectRef idx="0">
+            <a:srgbClr val="FFFFFF"/>
+          </a:effectRef>
+          <a:fontRef idx="minor">
+            <a:schemeClr val="lt1"/>
+          </a:fontRef>
+        </p:style>
+        <p:txBody>
+          <a:bodyPr rtlCol="0" anchor="ctr"/>
+          <a:p>
+            <a:pPr algn="ctr"/>
+            <a:endParaRPr lang="zh-CN" altLang="en-US"/>
+          </a:p>
+        </p:txBody>
+      </p:sp>
+      <p:sp>
+        <p:nvSpPr>
+          <p:cNvPr id="99" name="文本框 98"/>
+          <p:cNvSpPr txBox="1"/>
+          <p:nvPr/>
+        </p:nvSpPr>
+        <p:spPr>
+          <a:xfrm>
+            <a:off x="5328285" y="1786255"/>
+            <a:ext cx="1216025" cy="329565"/>
+          </a:xfrm>
+          <a:prstGeom prst="rect">
+            <a:avLst/>
+          </a:prstGeom>
+          <a:noFill/>
+        </p:spPr>
+        <p:txBody>
+          <a:bodyPr wrap="square" rtlCol="0">
+            <a:noAutofit/>
+          </a:bodyPr>
+          <a:p>
+            <a:pPr algn="ctr"/>
+            <a:r>
+              <a:rPr lang="en-US" altLang="zh-CN" sz="1000" b="1"/>
+              <a:t>Visual Stimulus</a:t>
+            </a:r>
+            <a:endParaRPr lang="en-US" altLang="zh-CN" sz="1000" b="1"/>
+          </a:p>
+        </p:txBody>
+      </p:sp>
+      <p:sp>
+        <p:nvSpPr>
+          <p:cNvPr id="101" name="流程图: 可选过程 100"/>
+          <p:cNvSpPr/>
+          <p:nvPr/>
+        </p:nvSpPr>
+        <p:spPr>
+          <a:xfrm>
+            <a:off x="8086725" y="5253990"/>
+            <a:ext cx="1259205" cy="424815"/>
+          </a:xfrm>
+          <a:prstGeom prst="flowChartAlternateProcess">
+            <a:avLst/>
+          </a:prstGeom>
+          <a:solidFill>
+            <a:schemeClr val="accent2">
+              <a:lumMod val="20000"/>
+              <a:lumOff val="80000"/>
+            </a:schemeClr>
+          </a:solidFill>
+          <a:ln>
+            <a:solidFill>
+              <a:schemeClr val="accent2">
+                <a:lumMod val="20000"/>
+                <a:lumOff val="80000"/>
+              </a:schemeClr>
+            </a:solidFill>
+          </a:ln>
+        </p:spPr>
+        <p:style>
+          <a:lnRef idx="2">
+            <a:schemeClr val="accent1">
+              <a:lumMod val="75000"/>
+            </a:schemeClr>
+          </a:lnRef>
+          <a:fillRef idx="1">
+            <a:schemeClr val="accent1"/>
+          </a:fillRef>
+          <a:effectRef idx="0">
+            <a:srgbClr val="FFFFFF"/>
+          </a:effectRef>
+          <a:fontRef idx="minor">
+            <a:schemeClr val="lt1"/>
+          </a:fontRef>
+        </p:style>
+        <p:txBody>
+          <a:bodyPr rtlCol="0" anchor="ctr"/>
+          <a:p>
+            <a:pPr algn="ctr"/>
+            <a:r>
+              <a:rPr lang="zh-CN" altLang="en-US" sz="900" b="1">
+                <a:solidFill>
+                  <a:schemeClr val="tx1"/>
+                </a:solidFill>
+                <a:latin typeface="Calibri" panose="020F0502020204030204" charset="0"/>
+                <a:ea typeface="微软雅黑" panose="020B0503020204020204" charset="-122"/>
+                <a:cs typeface="Calibri" panose="020F0502020204030204" charset="0"/>
+              </a:rPr>
+              <a:t>这是一</a:t>
+            </a:r>
+            <a:r>
+              <a:rPr lang="en-US" altLang="zh-CN" sz="900" b="1">
+                <a:solidFill>
+                  <a:schemeClr val="tx1"/>
+                </a:solidFill>
+                <a:latin typeface="Calibri" panose="020F0502020204030204" charset="0"/>
+                <a:ea typeface="微软雅黑" panose="020B0503020204020204" charset="-122"/>
+                <a:cs typeface="Calibri" panose="020F0502020204030204" charset="0"/>
+              </a:rPr>
+              <a:t>_____</a:t>
+            </a:r>
+            <a:endParaRPr lang="en-US" altLang="zh-CN" sz="900" b="1">
+              <a:solidFill>
+                <a:schemeClr val="tx1"/>
+              </a:solidFill>
+              <a:latin typeface="Calibri" panose="020F0502020204030204" charset="0"/>
+              <a:ea typeface="微软雅黑" panose="020B0503020204020204" charset="-122"/>
+              <a:cs typeface="Calibri" panose="020F0502020204030204" charset="0"/>
+            </a:endParaRPr>
+          </a:p>
+        </p:txBody>
+      </p:sp>
+      <p:sp>
+        <p:nvSpPr>
+          <p:cNvPr id="102" name="圆角矩形 101"/>
+          <p:cNvSpPr/>
+          <p:nvPr/>
+        </p:nvSpPr>
+        <p:spPr>
+          <a:xfrm>
+            <a:off x="9646920" y="4784725"/>
+            <a:ext cx="1633220" cy="1379220"/>
+          </a:xfrm>
+          <a:prstGeom prst="roundRect">
+            <a:avLst/>
+          </a:prstGeom>
+          <a:solidFill>
+            <a:schemeClr val="bg1"/>
+          </a:solidFill>
+          <a:ln>
+            <a:solidFill>
+              <a:schemeClr val="accent2">
+                <a:lumMod val="20000"/>
+                <a:lumOff val="80000"/>
+              </a:schemeClr>
+            </a:solidFill>
+          </a:ln>
+        </p:spPr>
+        <p:style>
+          <a:lnRef idx="2">
+            <a:schemeClr val="accent1">
+              <a:lumMod val="75000"/>
+            </a:schemeClr>
+          </a:lnRef>
+          <a:fillRef idx="1">
+            <a:schemeClr val="accent1"/>
+          </a:fillRef>
+          <a:effectRef idx="0">
+            <a:srgbClr val="FFFFFF"/>
+          </a:effectRef>
+          <a:fontRef idx="minor">
+            <a:schemeClr val="lt1"/>
+          </a:fontRef>
+        </p:style>
+        <p:txBody>
+          <a:bodyPr rtlCol="0" anchor="ctr"/>
+          <a:p>
+            <a:pPr algn="ctr"/>
+            <a:endParaRPr lang="zh-CN" altLang="en-US"/>
+          </a:p>
+        </p:txBody>
+      </p:sp>
+      <p:sp>
+        <p:nvSpPr>
+          <p:cNvPr id="103" name="文本框 102"/>
+          <p:cNvSpPr txBox="1"/>
+          <p:nvPr/>
+        </p:nvSpPr>
+        <p:spPr>
+          <a:xfrm>
+            <a:off x="9798050" y="4890135"/>
+            <a:ext cx="1339850" cy="1143635"/>
+          </a:xfrm>
+          <a:prstGeom prst="rect">
+            <a:avLst/>
+          </a:prstGeom>
+          <a:noFill/>
+        </p:spPr>
+        <p:txBody>
+          <a:bodyPr wrap="square" rtlCol="0">
+            <a:noAutofit/>
+          </a:bodyPr>
+          <a:p>
+            <a:pPr marL="285750" indent="-285750">
+              <a:buFont typeface="Wingdings" panose="05000000000000000000" charset="0"/>
+              <a:buChar char="l"/>
+            </a:pPr>
+            <a:r>
+              <a:rPr lang="zh-CN" altLang="en-US" sz="900" b="1"/>
+              <a:t>套</a:t>
+            </a:r>
+            <a:r>
+              <a:rPr lang="zh-CN" altLang="en-US" sz="900" b="1"/>
+              <a:t>西服</a:t>
+            </a:r>
+            <a:endParaRPr lang="zh-CN" altLang="en-US" sz="900" b="1"/>
+          </a:p>
+          <a:p>
+            <a:pPr marL="285750" indent="-285750">
+              <a:buFont typeface="Wingdings" panose="05000000000000000000" charset="0"/>
+              <a:buChar char="l"/>
+            </a:pPr>
+            <a:endParaRPr lang="zh-CN" altLang="en-US" sz="900" b="1"/>
+          </a:p>
+          <a:p>
+            <a:pPr marL="285750" indent="-285750">
+              <a:buFont typeface="Wingdings" panose="05000000000000000000" charset="0"/>
+              <a:buChar char="l"/>
+            </a:pPr>
+            <a:r>
+              <a:rPr lang="zh-CN" altLang="en-US" sz="900" b="1"/>
+              <a:t>身</a:t>
+            </a:r>
+            <a:r>
+              <a:rPr lang="zh-CN" altLang="en-US" sz="900" b="1"/>
+              <a:t>西装</a:t>
+            </a:r>
+            <a:endParaRPr lang="zh-CN" altLang="en-US" sz="900" b="1"/>
+          </a:p>
+          <a:p>
+            <a:pPr marL="285750" indent="-285750">
+              <a:buFont typeface="Wingdings" panose="05000000000000000000" charset="0"/>
+              <a:buChar char="l"/>
+            </a:pPr>
+            <a:endParaRPr lang="zh-CN" altLang="en-US" sz="900" b="1"/>
+          </a:p>
+          <a:p>
+            <a:pPr marL="285750" indent="-285750">
+              <a:buFont typeface="Wingdings" panose="05000000000000000000" charset="0"/>
+              <a:buChar char="l"/>
+            </a:pPr>
+            <a:r>
+              <a:rPr lang="zh-CN" altLang="en-US" sz="900" b="1"/>
+              <a:t>套黑色的</a:t>
+            </a:r>
+            <a:r>
+              <a:rPr lang="zh-CN" altLang="en-US" sz="900" b="1"/>
+              <a:t>西服</a:t>
+            </a:r>
+            <a:endParaRPr lang="zh-CN" altLang="en-US" sz="900" b="1"/>
+          </a:p>
+          <a:p>
+            <a:pPr marL="285750" indent="-285750">
+              <a:buFont typeface="Wingdings" panose="05000000000000000000" charset="0"/>
+              <a:buChar char="l"/>
+            </a:pPr>
+            <a:endParaRPr lang="zh-CN" altLang="en-US" sz="900" b="1"/>
+          </a:p>
+          <a:p>
+            <a:pPr marL="285750" indent="-285750">
+              <a:buFont typeface="Wingdings" panose="05000000000000000000" charset="0"/>
+              <a:buChar char="l"/>
+            </a:pPr>
+            <a:r>
+              <a:rPr lang="zh-CN" altLang="en-US" sz="900" b="1"/>
+              <a:t>件黑色的</a:t>
+            </a:r>
+            <a:r>
+              <a:rPr lang="zh-CN" altLang="en-US" sz="900" b="1"/>
+              <a:t>衣服</a:t>
+            </a:r>
+            <a:endParaRPr lang="zh-CN" altLang="en-US" sz="900" b="1"/>
+          </a:p>
+          <a:p>
+            <a:pPr marL="285750" indent="-285750">
+              <a:buFont typeface="Wingdings" panose="05000000000000000000" charset="0"/>
+              <a:buChar char="l"/>
+            </a:pPr>
+            <a:endParaRPr lang="zh-CN" altLang="en-US" sz="900" b="1"/>
+          </a:p>
+          <a:p>
+            <a:pPr marL="285750" indent="-285750">
+              <a:buFont typeface="Wingdings" panose="05000000000000000000" charset="0"/>
+              <a:buChar char="l"/>
+            </a:pPr>
+            <a:endParaRPr lang="zh-CN" altLang="en-US" sz="900" b="1"/>
+          </a:p>
+          <a:p>
+            <a:pPr marL="285750" indent="-285750">
+              <a:buFont typeface="Wingdings" panose="05000000000000000000" charset="0"/>
+              <a:buChar char="l"/>
+            </a:pPr>
+            <a:endParaRPr lang="zh-CN" altLang="en-US" sz="900" b="1"/>
+          </a:p>
+        </p:txBody>
+      </p:sp>
+      <p:pic>
+        <p:nvPicPr>
+          <p:cNvPr id="5" name="图片 4" descr="free_1845057_2358638_1845057_suit"/>
+          <p:cNvPicPr>
+            <a:picLocks noChangeAspect="1"/>
+          </p:cNvPicPr>
+          <p:nvPr/>
+        </p:nvPicPr>
+        <p:blipFill>
+          <a:blip r:embed="rId1"/>
+          <a:stretch>
+            <a:fillRect/>
+          </a:stretch>
+        </p:blipFill>
+        <p:spPr>
+          <a:xfrm>
+            <a:off x="5452110" y="2039620"/>
+            <a:ext cx="968375" cy="1324610"/>
+          </a:xfrm>
+          <a:prstGeom prst="rect">
+            <a:avLst/>
+          </a:prstGeom>
+        </p:spPr>
+      </p:pic>
+      <p:pic>
+        <p:nvPicPr>
+          <p:cNvPr id="3" name="图片 2" descr="LLM"/>
+          <p:cNvPicPr>
+            <a:picLocks noChangeAspect="1"/>
+          </p:cNvPicPr>
+          <p:nvPr/>
+        </p:nvPicPr>
+        <p:blipFill>
+          <a:blip r:embed="rId2"/>
+          <a:stretch>
+            <a:fillRect/>
+          </a:stretch>
+        </p:blipFill>
+        <p:spPr>
+          <a:xfrm>
+            <a:off x="5452110" y="223520"/>
+            <a:ext cx="986155" cy="986155"/>
+          </a:xfrm>
+          <a:prstGeom prst="rect">
+            <a:avLst/>
+          </a:prstGeom>
+        </p:spPr>
+      </p:pic>
+      <p:sp>
+        <p:nvSpPr>
+          <p:cNvPr id="9" name="下箭头标注 8"/>
+          <p:cNvSpPr/>
+          <p:nvPr/>
+        </p:nvSpPr>
+        <p:spPr>
+          <a:xfrm>
+            <a:off x="5601335" y="1209675"/>
+            <a:ext cx="670560" cy="499745"/>
+          </a:xfrm>
+          <a:prstGeom prst="downArrowCallout">
+            <a:avLst/>
+          </a:prstGeom>
+          <a:solidFill>
+            <a:schemeClr val="accent6"/>
+          </a:solidFill>
+          <a:ln>
+            <a:solidFill>
+              <a:schemeClr val="accent6"/>
+            </a:solidFill>
+          </a:ln>
+        </p:spPr>
+        <p:style>
+          <a:lnRef idx="2">
+            <a:schemeClr val="accent1">
+              <a:lumMod val="75000"/>
+            </a:schemeClr>
+          </a:lnRef>
+          <a:fillRef idx="1">
+            <a:schemeClr val="accent1"/>
+          </a:fillRef>
+          <a:effectRef idx="0">
+            <a:srgbClr val="FFFFFF"/>
+          </a:effectRef>
+          <a:fontRef idx="minor">
+            <a:schemeClr val="lt1"/>
+          </a:fontRef>
+        </p:style>
+        <p:txBody>
+          <a:bodyPr rtlCol="0" anchor="ctr"/>
+          <a:p>
+            <a:pPr algn="ctr"/>
+            <a:r>
+              <a:rPr lang="en-US" altLang="zh-CN" sz="900" b="1"/>
+              <a:t>Recognize</a:t>
+            </a:r>
+            <a:endParaRPr lang="en-US" altLang="zh-CN" sz="900" b="1"/>
+          </a:p>
+        </p:txBody>
+      </p:sp>
+      <p:cxnSp>
+        <p:nvCxnSpPr>
+          <p:cNvPr id="8" name="直接箭头连接符 7"/>
+          <p:cNvCxnSpPr>
+            <a:stCxn id="5" idx="2"/>
+            <a:endCxn id="7" idx="3"/>
+          </p:cNvCxnSpPr>
+          <p:nvPr/>
+        </p:nvCxnSpPr>
+        <p:spPr>
+          <a:xfrm flipH="1">
+            <a:off x="2161540" y="3364230"/>
+            <a:ext cx="3775075" cy="622300"/>
+          </a:xfrm>
+          <a:prstGeom prst="straightConnector1">
+            <a:avLst/>
+          </a:prstGeom>
+          <a:ln>
+            <a:tailEnd type="arrow"/>
+          </a:ln>
+        </p:spPr>
+        <p:style>
+          <a:lnRef idx="2">
+            <a:schemeClr val="accent1"/>
+          </a:lnRef>
+          <a:fillRef idx="0">
+            <a:srgbClr val="FFFFFF"/>
+          </a:fillRef>
+          <a:effectRef idx="0">
+            <a:srgbClr val="FFFFFF"/>
+          </a:effectRef>
+          <a:fontRef idx="minor">
+            <a:schemeClr val="tx1"/>
+          </a:fontRef>
+        </p:style>
+      </p:cxnSp>
+      <p:cxnSp>
+        <p:nvCxnSpPr>
+          <p:cNvPr id="12" name="直接箭头连接符 11"/>
+          <p:cNvCxnSpPr>
+            <a:stCxn id="5" idx="2"/>
+            <a:endCxn id="93" idx="3"/>
+          </p:cNvCxnSpPr>
+          <p:nvPr/>
+        </p:nvCxnSpPr>
+        <p:spPr>
+          <a:xfrm>
+            <a:off x="5936615" y="3364230"/>
+            <a:ext cx="3787140" cy="622300"/>
+          </a:xfrm>
+          <a:prstGeom prst="straightConnector1">
+            <a:avLst/>
+          </a:prstGeom>
+          <a:ln>
+            <a:tailEnd type="arrow"/>
+          </a:ln>
+        </p:spPr>
+        <p:style>
+          <a:lnRef idx="2">
+            <a:schemeClr val="accent1"/>
+          </a:lnRef>
+          <a:fillRef idx="0">
+            <a:srgbClr val="FFFFFF"/>
+          </a:fillRef>
+          <a:effectRef idx="0">
+            <a:srgbClr val="FFFFFF"/>
+          </a:effectRef>
+          <a:fontRef idx="minor">
+            <a:schemeClr val="tx1"/>
+          </a:fontRef>
+        </p:style>
+      </p:cxnSp>
+      <p:cxnSp>
+        <p:nvCxnSpPr>
+          <p:cNvPr id="14" name="直接箭头连接符 13"/>
+          <p:cNvCxnSpPr>
+            <a:stCxn id="5" idx="2"/>
+            <a:endCxn id="45" idx="3"/>
+          </p:cNvCxnSpPr>
+          <p:nvPr/>
+        </p:nvCxnSpPr>
+        <p:spPr>
+          <a:xfrm>
+            <a:off x="5936615" y="3364230"/>
+            <a:ext cx="0" cy="622300"/>
+          </a:xfrm>
+          <a:prstGeom prst="straightConnector1">
+            <a:avLst/>
+          </a:prstGeom>
+          <a:ln>
+            <a:tailEnd type="arrow"/>
+          </a:ln>
+        </p:spPr>
+        <p:style>
+          <a:lnRef idx="2">
+            <a:schemeClr val="accent1"/>
+          </a:lnRef>
+          <a:fillRef idx="0">
+            <a:srgbClr val="FFFFFF"/>
+          </a:fillRef>
+          <a:effectRef idx="0">
+            <a:srgbClr val="FFFFFF"/>
+          </a:effectRef>
+          <a:fontRef idx="minor">
+            <a:schemeClr val="tx1"/>
+          </a:fontRef>
+        </p:style>
+      </p:cxnSp>
     </p:spTree>
   </p:cSld>
   <p:clrMapOvr>
@@ -4985,6 +7214,37 @@
       </a:bgFillStyleLst>
     </a:fmtScheme>
   </a:themeElements>
+  <a:objectDefaults>
+    <a:spDef>
+      <a:spPr>
+        <a:solidFill>
+          <a:schemeClr val="accent4"/>
+        </a:solidFill>
+      </a:spPr>
+      <a:bodyPr rtlCol="0" anchor="ctr"/>
+      <a:lstStyle>
+        <a:defPPr algn="ctr">
+          <a:defRPr lang="en-US" altLang="zh-CN" sz="900" b="1"/>
+        </a:defPPr>
+      </a:lstStyle>
+      <a:style>
+        <a:lnRef idx="2">
+          <a:schemeClr val="accent1">
+            <a:lumMod val="75000"/>
+          </a:schemeClr>
+        </a:lnRef>
+        <a:fillRef idx="1">
+          <a:schemeClr val="accent1"/>
+        </a:fillRef>
+        <a:effectRef idx="0">
+          <a:srgbClr val="FFFFFF"/>
+        </a:effectRef>
+        <a:fontRef idx="minor">
+          <a:schemeClr val="lt1"/>
+        </a:fontRef>
+      </a:style>
+    </a:spDef>
+  </a:objectDefaults>
   <a:extLst>
     <a:ext uri="{05A4C25C-085E-4340-85A3-A5531E510DB2}">
       <thm15:themeFamily xmlns:thm15="http://schemas.microsoft.com/office/thememl/2012/main" name="Office Theme" id="{62F939B6-93AF-4DB8-9C6B-D6C7DFDC589F}" vid="{4A3C46E8-61CC-4603-A589-7422A47A8E4A}"/>
